--- a/Tis so sweet to trust in Jesus.pptx
+++ b/Tis so sweet to trust in Jesus.pptx
@@ -249,7 +249,7 @@
           <a:p>
             <a:fld id="{E759A0DE-F190-5444-87AC-4719D5F20D15}" type="datetimeFigureOut">
               <a:rPr lang="en-US" smtClean="0"/>
-              <a:t>7/14/26</a:t>
+              <a:t>10/16/26</a:t>
             </a:fld>
             <a:endParaRPr lang="en-US"/>
           </a:p>
@@ -419,7 +419,7 @@
           <a:p>
             <a:fld id="{E759A0DE-F190-5444-87AC-4719D5F20D15}" type="datetimeFigureOut">
               <a:rPr lang="en-US" smtClean="0"/>
-              <a:t>7/14/26</a:t>
+              <a:t>10/16/26</a:t>
             </a:fld>
             <a:endParaRPr lang="en-US"/>
           </a:p>
@@ -599,7 +599,7 @@
           <a:p>
             <a:fld id="{E759A0DE-F190-5444-87AC-4719D5F20D15}" type="datetimeFigureOut">
               <a:rPr lang="en-US" smtClean="0"/>
-              <a:t>7/14/26</a:t>
+              <a:t>10/16/26</a:t>
             </a:fld>
             <a:endParaRPr lang="en-US"/>
           </a:p>
@@ -769,7 +769,7 @@
           <a:p>
             <a:fld id="{E759A0DE-F190-5444-87AC-4719D5F20D15}" type="datetimeFigureOut">
               <a:rPr lang="en-US" smtClean="0"/>
-              <a:t>7/14/26</a:t>
+              <a:t>10/16/26</a:t>
             </a:fld>
             <a:endParaRPr lang="en-US"/>
           </a:p>
@@ -1015,7 +1015,7 @@
           <a:p>
             <a:fld id="{E759A0DE-F190-5444-87AC-4719D5F20D15}" type="datetimeFigureOut">
               <a:rPr lang="en-US" smtClean="0"/>
-              <a:t>7/14/26</a:t>
+              <a:t>10/16/26</a:t>
             </a:fld>
             <a:endParaRPr lang="en-US"/>
           </a:p>
@@ -1247,7 +1247,7 @@
           <a:p>
             <a:fld id="{E759A0DE-F190-5444-87AC-4719D5F20D15}" type="datetimeFigureOut">
               <a:rPr lang="en-US" smtClean="0"/>
-              <a:t>7/14/26</a:t>
+              <a:t>10/16/26</a:t>
             </a:fld>
             <a:endParaRPr lang="en-US"/>
           </a:p>
@@ -1614,7 +1614,7 @@
           <a:p>
             <a:fld id="{E759A0DE-F190-5444-87AC-4719D5F20D15}" type="datetimeFigureOut">
               <a:rPr lang="en-US" smtClean="0"/>
-              <a:t>7/14/26</a:t>
+              <a:t>10/16/26</a:t>
             </a:fld>
             <a:endParaRPr lang="en-US"/>
           </a:p>
@@ -1732,7 +1732,7 @@
           <a:p>
             <a:fld id="{E759A0DE-F190-5444-87AC-4719D5F20D15}" type="datetimeFigureOut">
               <a:rPr lang="en-US" smtClean="0"/>
-              <a:t>7/14/26</a:t>
+              <a:t>10/16/26</a:t>
             </a:fld>
             <a:endParaRPr lang="en-US"/>
           </a:p>
@@ -1827,7 +1827,7 @@
           <a:p>
             <a:fld id="{E759A0DE-F190-5444-87AC-4719D5F20D15}" type="datetimeFigureOut">
               <a:rPr lang="en-US" smtClean="0"/>
-              <a:t>7/14/26</a:t>
+              <a:t>10/16/26</a:t>
             </a:fld>
             <a:endParaRPr lang="en-US"/>
           </a:p>
@@ -2104,7 +2104,7 @@
           <a:p>
             <a:fld id="{E759A0DE-F190-5444-87AC-4719D5F20D15}" type="datetimeFigureOut">
               <a:rPr lang="en-US" smtClean="0"/>
-              <a:t>7/14/26</a:t>
+              <a:t>10/16/26</a:t>
             </a:fld>
             <a:endParaRPr lang="en-US"/>
           </a:p>
@@ -2361,7 +2361,7 @@
           <a:p>
             <a:fld id="{E759A0DE-F190-5444-87AC-4719D5F20D15}" type="datetimeFigureOut">
               <a:rPr lang="en-US" smtClean="0"/>
-              <a:t>7/14/26</a:t>
+              <a:t>10/16/26</a:t>
             </a:fld>
             <a:endParaRPr lang="en-US"/>
           </a:p>
@@ -2574,7 +2574,7 @@
           <a:p>
             <a:fld id="{E759A0DE-F190-5444-87AC-4719D5F20D15}" type="datetimeFigureOut">
               <a:rPr lang="en-US" smtClean="0"/>
-              <a:t>7/14/26</a:t>
+              <a:t>10/16/26</a:t>
             </a:fld>
             <a:endParaRPr lang="en-US"/>
           </a:p>
@@ -4085,71 +4085,6 @@
           </a:p>
         </p:txBody>
       </p:sp>
-      <p:sp>
-        <p:nvSpPr>
-          <p:cNvPr id="2" name="TextBox 1">
-            <a:extLst>
-              <a:ext uri="{FF2B5EF4-FFF2-40B4-BE49-F238E27FC236}">
-                <a16:creationId xmlns:a16="http://schemas.microsoft.com/office/drawing/2014/main" id="{FD1CF810-E07A-8E1E-88FD-A10AD65F9DFD}"/>
-              </a:ext>
-            </a:extLst>
-          </p:cNvPr>
-          <p:cNvSpPr txBox="1"/>
-          <p:nvPr/>
-        </p:nvSpPr>
-        <p:spPr>
-          <a:xfrm>
-            <a:off x="7390614" y="6488668"/>
-            <a:ext cx="1753386" cy="369332"/>
-          </a:xfrm>
-          <a:prstGeom prst="rect">
-            <a:avLst/>
-          </a:prstGeom>
-          <a:noFill/>
-        </p:spPr>
-        <p:txBody>
-          <a:bodyPr wrap="square" rtlCol="0">
-            <a:spAutoFit/>
-          </a:bodyPr>
-          <a:lstStyle/>
-          <a:p>
-            <a:pPr marL="0" marR="0" lvl="0" indent="0" algn="l" defTabSz="457200" rtl="0" eaLnBrk="1" fontAlgn="auto" latinLnBrk="0" hangingPunct="1">
-              <a:lnSpc>
-                <a:spcPct val="100000"/>
-              </a:lnSpc>
-              <a:spcBef>
-                <a:spcPts val="0"/>
-              </a:spcBef>
-              <a:spcAft>
-                <a:spcPts val="0"/>
-              </a:spcAft>
-              <a:buClrTx/>
-              <a:buSzTx/>
-              <a:buFontTx/>
-              <a:buNone/>
-              <a:tabLst/>
-              <a:defRPr/>
-            </a:pPr>
-            <a:r>
-              <a:rPr kumimoji="0" lang="en-US" sz="1800" b="0" i="0" u="none" strike="noStrike" kern="1200" cap="none" spc="0" normalizeH="0" baseline="0" noProof="0" dirty="0">
-                <a:ln>
-                  <a:noFill/>
-                </a:ln>
-                <a:solidFill>
-                  <a:prstClr val="white"/>
-                </a:solidFill>
-                <a:effectLst/>
-                <a:uLnTx/>
-                <a:uFillTx/>
-                <a:latin typeface="Aptos" panose="02110004020202020204"/>
-                <a:ea typeface="+mn-ea"/>
-                <a:cs typeface="+mn-cs"/>
-              </a:rPr>
-              <a:t>CCLI#7102397</a:t>
-            </a:r>
-          </a:p>
-        </p:txBody>
-      </p:sp>
     </p:spTree>
     <p:extLst>
       <p:ext uri="{BB962C8B-B14F-4D97-AF65-F5344CB8AC3E}">
